--- a/web/showcase/pptx/flagships/default/twin-output.pptx
+++ b/web/showcase/pptx/flagships/default/twin-output.pptx
@@ -3244,7 +3244,7 @@
               <a:defRPr/>
             </a:pPr>
             <a:r>
-              <a:rPr lang="en-US" sz="880" b="true" i="false" u="none" strike="noStrike" kern="0">
+              <a:rPr lang="en-US" sz="880" b="false" i="false" u="none" strike="noStrike" kern="0">
                 <a:solidFill>
                   <a:srgbClr val="37D6A1"/>
                 </a:solidFill>
@@ -3290,7 +3290,7 @@
               <a:defRPr/>
             </a:pPr>
             <a:r>
-              <a:rPr lang="en-US" sz="3200" b="true" i="false" u="none" strike="noStrike" kern="0">
+              <a:rPr lang="en-US" sz="3200" b="false" i="false" u="none" strike="noStrike" kern="0">
                 <a:solidFill>
                   <a:srgbClr val="F5F7FC"/>
                 </a:solidFill>
@@ -3336,7 +3336,7 @@
               <a:defRPr/>
             </a:pPr>
             <a:r>
-              <a:rPr lang="en-US" sz="3200" b="true" i="false" u="none" strike="noStrike" kern="0">
+              <a:rPr lang="en-US" sz="3200" b="false" i="false" u="none" strike="noStrike" kern="0">
                 <a:solidFill>
                   <a:srgbClr val="B59FFF"/>
                 </a:solidFill>
@@ -4370,7 +4370,7 @@
               <a:defRPr/>
             </a:pPr>
             <a:r>
-              <a:rPr lang="en-US" sz="880" b="true" i="false" u="none" strike="noStrike" kern="0">
+              <a:rPr lang="en-US" sz="880" b="false" i="false" u="none" strike="noStrike" kern="0">
                 <a:solidFill>
                   <a:srgbClr val="37D6A1"/>
                 </a:solidFill>

--- a/web/showcase/pptx/flagships/default/twin-output.pptx
+++ b/web/showcase/pptx/flagships/default/twin-output.pptx
@@ -3244,7 +3244,7 @@
               <a:defRPr/>
             </a:pPr>
             <a:r>
-              <a:rPr lang="en-US" sz="880" b="false" i="false" u="none" strike="noStrike" kern="0">
+              <a:rPr lang="en-US" sz="880" b="true" i="false" u="none" strike="noStrike" kern="0">
                 <a:solidFill>
                   <a:srgbClr val="37D6A1"/>
                 </a:solidFill>
@@ -3265,7 +3265,7 @@
         <p:spPr>
           <a:xfrm>
             <a:off x="660400" y="1625692"/>
-            <a:ext cx="2395372" cy="375920"/>
+            <a:ext cx="2575408" cy="375920"/>
           </a:xfrm>
           <a:prstGeom prst="rect">
             <a:avLst/>
@@ -3290,7 +3290,7 @@
               <a:defRPr/>
             </a:pPr>
             <a:r>
-              <a:rPr lang="en-US" sz="3200" b="false" i="false" u="none" strike="noStrike" kern="0">
+              <a:rPr lang="en-US" sz="3200" b="true" i="false" u="none" strike="noStrike" kern="0">
                 <a:solidFill>
                   <a:srgbClr val="F5F7FC"/>
                 </a:solidFill>
@@ -3311,7 +3311,7 @@
         <p:spPr>
           <a:xfrm>
             <a:off x="660400" y="2159092"/>
-            <a:ext cx="2937510" cy="375920"/>
+            <a:ext cx="3117952" cy="375920"/>
           </a:xfrm>
           <a:prstGeom prst="rect">
             <a:avLst/>
@@ -3336,7 +3336,7 @@
               <a:defRPr/>
             </a:pPr>
             <a:r>
-              <a:rPr lang="en-US" sz="3200" b="false" i="false" u="none" strike="noStrike" kern="0">
+              <a:rPr lang="en-US" sz="3200" b="true" i="false" u="none" strike="noStrike" kern="0">
                 <a:solidFill>
                   <a:srgbClr val="B59FFF"/>
                 </a:solidFill>
@@ -4370,7 +4370,7 @@
               <a:defRPr/>
             </a:pPr>
             <a:r>
-              <a:rPr lang="en-US" sz="880" b="false" i="false" u="none" strike="noStrike" kern="0">
+              <a:rPr lang="en-US" sz="880" b="true" i="false" u="none" strike="noStrike" kern="0">
                 <a:solidFill>
                   <a:srgbClr val="37D6A1"/>
                 </a:solidFill>
